--- a/Reporte 050326.pptx
+++ b/Reporte 050326.pptx
@@ -5,7 +5,7 @@
     <p:sldMasterId id="2147483672" r:id="rId1"/>
   </p:sldMasterIdLst>
   <p:notesMasterIdLst>
-    <p:notesMasterId r:id="rId16"/>
+    <p:notesMasterId r:id="rId17"/>
   </p:notesMasterIdLst>
   <p:sldIdLst>
     <p:sldId id="350" r:id="rId2"/>
@@ -19,25 +19,26 @@
     <p:sldId id="351" r:id="rId10"/>
     <p:sldId id="369" r:id="rId11"/>
     <p:sldId id="361" r:id="rId12"/>
-    <p:sldId id="370" r:id="rId13"/>
-    <p:sldId id="371" r:id="rId14"/>
-    <p:sldId id="280" r:id="rId15"/>
+    <p:sldId id="371" r:id="rId13"/>
+    <p:sldId id="370" r:id="rId14"/>
+    <p:sldId id="379" r:id="rId15"/>
+    <p:sldId id="280" r:id="rId16"/>
   </p:sldIdLst>
   <p:sldSz cx="9144000" cy="5143500" type="screen16x9"/>
   <p:notesSz cx="6858000" cy="9144000"/>
   <p:embeddedFontLst>
     <p:embeddedFont>
-      <p:font typeface="Montserrat" pitchFamily="2" charset="0"/>
-      <p:regular r:id="rId17"/>
-      <p:bold r:id="rId18"/>
-      <p:italic r:id="rId19"/>
-      <p:boldItalic r:id="rId20"/>
+      <p:font typeface="Montserrat" panose="00000500000000000000" pitchFamily="2" charset="0"/>
+      <p:regular r:id="rId18"/>
+      <p:bold r:id="rId19"/>
+      <p:italic r:id="rId20"/>
+      <p:boldItalic r:id="rId21"/>
     </p:embeddedFont>
     <p:embeddedFont>
-      <p:font typeface="Montserrat Black" pitchFamily="2" charset="0"/>
-      <p:bold r:id="rId21"/>
-      <p:italic r:id="rId22"/>
-      <p:boldItalic r:id="rId23"/>
+      <p:font typeface="Montserrat Black" panose="00000A00000000000000" pitchFamily="2" charset="0"/>
+      <p:bold r:id="rId22"/>
+      <p:italic r:id="rId23"/>
+      <p:boldItalic r:id="rId24"/>
     </p:embeddedFont>
   </p:embeddedFontLst>
   <p:defaultTextStyle>
@@ -6132,12 +6133,50 @@
           <a:chExt cx="0" cy="0"/>
         </a:xfrm>
       </p:grpSpPr>
+      <p:sp>
+        <p:nvSpPr>
+          <p:cNvPr id="5" name="CuadroTexto 4">
+            <a:extLst>
+              <a:ext uri="{FF2B5EF4-FFF2-40B4-BE49-F238E27FC236}">
+                <a16:creationId xmlns:a16="http://schemas.microsoft.com/office/drawing/2014/main" id="{2D220DED-6E95-D0AE-57E3-7DFB60F03ADD}"/>
+              </a:ext>
+            </a:extLst>
+          </p:cNvPr>
+          <p:cNvSpPr txBox="1"/>
+          <p:nvPr/>
+        </p:nvSpPr>
+        <p:spPr>
+          <a:xfrm>
+            <a:off x="1183340" y="0"/>
+            <a:ext cx="6763871" cy="369332"/>
+          </a:xfrm>
+          <a:prstGeom prst="rect">
+            <a:avLst/>
+          </a:prstGeom>
+          <a:noFill/>
+        </p:spPr>
+        <p:txBody>
+          <a:bodyPr wrap="square" rtlCol="0">
+            <a:spAutoFit/>
+          </a:bodyPr>
+          <a:lstStyle/>
+          <a:p>
+            <a:pPr algn="ctr"/>
+            <a:r>
+              <a:rPr lang="es-MX" sz="1800" b="1" dirty="0">
+                <a:latin typeface="Montserrat" panose="00000500000000000000" pitchFamily="2" charset="0"/>
+              </a:rPr>
+              <a:t>Información de gobierno en radiodifusoras</a:t>
+            </a:r>
+          </a:p>
+        </p:txBody>
+      </p:sp>
       <p:pic>
         <p:nvPicPr>
-          <p:cNvPr id="3" name="Imagen 2">
+          <p:cNvPr id="7" name="Imagen 6">
             <a:extLst>
               <a:ext uri="{FF2B5EF4-FFF2-40B4-BE49-F238E27FC236}">
-                <a16:creationId xmlns:a16="http://schemas.microsoft.com/office/drawing/2014/main" id="{7D43A751-D518-59A9-BD16-267EC0F517A6}"/>
+                <a16:creationId xmlns:a16="http://schemas.microsoft.com/office/drawing/2014/main" id="{FC440B4F-DDA8-55DF-1699-B4C0954EE619}"/>
               </a:ext>
             </a:extLst>
           </p:cNvPr>
@@ -6154,8 +6193,8 @@
         </p:blipFill>
         <p:spPr>
           <a:xfrm>
-            <a:off x="313355" y="153663"/>
-            <a:ext cx="8517290" cy="4989837"/>
+            <a:off x="205535" y="369332"/>
+            <a:ext cx="8659906" cy="4687471"/>
           </a:xfrm>
           <a:prstGeom prst="rect">
             <a:avLst/>
@@ -6192,12 +6231,50 @@
           <a:chExt cx="0" cy="0"/>
         </a:xfrm>
       </p:grpSpPr>
+      <p:sp>
+        <p:nvSpPr>
+          <p:cNvPr id="2" name="CuadroTexto 1">
+            <a:extLst>
+              <a:ext uri="{FF2B5EF4-FFF2-40B4-BE49-F238E27FC236}">
+                <a16:creationId xmlns:a16="http://schemas.microsoft.com/office/drawing/2014/main" id="{E270743E-55A0-8447-939B-33D92F1087F2}"/>
+              </a:ext>
+            </a:extLst>
+          </p:cNvPr>
+          <p:cNvSpPr txBox="1"/>
+          <p:nvPr/>
+        </p:nvSpPr>
+        <p:spPr>
+          <a:xfrm>
+            <a:off x="1183340" y="0"/>
+            <a:ext cx="6763871" cy="369332"/>
+          </a:xfrm>
+          <a:prstGeom prst="rect">
+            <a:avLst/>
+          </a:prstGeom>
+          <a:noFill/>
+        </p:spPr>
+        <p:txBody>
+          <a:bodyPr wrap="square" rtlCol="0">
+            <a:spAutoFit/>
+          </a:bodyPr>
+          <a:lstStyle/>
+          <a:p>
+            <a:pPr algn="ctr"/>
+            <a:r>
+              <a:rPr lang="es-MX" sz="1800" b="1" dirty="0">
+                <a:latin typeface="Montserrat" panose="00000500000000000000" pitchFamily="2" charset="0"/>
+              </a:rPr>
+              <a:t>Información de gobierno en radiodifusoras</a:t>
+            </a:r>
+          </a:p>
+        </p:txBody>
+      </p:sp>
       <p:pic>
         <p:nvPicPr>
-          <p:cNvPr id="3" name="Imagen 2">
+          <p:cNvPr id="5" name="Imagen 4">
             <a:extLst>
               <a:ext uri="{FF2B5EF4-FFF2-40B4-BE49-F238E27FC236}">
-                <a16:creationId xmlns:a16="http://schemas.microsoft.com/office/drawing/2014/main" id="{521CD1A5-CE84-0D61-4BBF-A40587193926}"/>
+                <a16:creationId xmlns:a16="http://schemas.microsoft.com/office/drawing/2014/main" id="{F6A17533-43E5-DD2D-91E3-6638555D8F82}"/>
               </a:ext>
             </a:extLst>
           </p:cNvPr>
@@ -6214,8 +6291,8 @@
         </p:blipFill>
         <p:spPr>
           <a:xfrm>
-            <a:off x="0" y="570150"/>
-            <a:ext cx="9144000" cy="4003200"/>
+            <a:off x="0" y="653111"/>
+            <a:ext cx="9144000" cy="3837277"/>
           </a:xfrm>
           <a:prstGeom prst="rect">
             <a:avLst/>
@@ -6236,6 +6313,104 @@
 </file>
 
 <file path=ppt/slides/slide12.xml><?xml version="1.0" encoding="utf-8"?>
+<p:sld xmlns:a="http://schemas.openxmlformats.org/drawingml/2006/main" xmlns:r="http://schemas.openxmlformats.org/officeDocument/2006/relationships" xmlns:p="http://schemas.openxmlformats.org/presentationml/2006/main">
+  <p:cSld>
+    <p:spTree>
+      <p:nvGrpSpPr>
+        <p:cNvPr id="1" name=""/>
+        <p:cNvGrpSpPr/>
+        <p:nvPr/>
+      </p:nvGrpSpPr>
+      <p:grpSpPr>
+        <a:xfrm>
+          <a:off x="0" y="0"/>
+          <a:ext cx="0" cy="0"/>
+          <a:chOff x="0" y="0"/>
+          <a:chExt cx="0" cy="0"/>
+        </a:xfrm>
+      </p:grpSpPr>
+      <p:sp>
+        <p:nvSpPr>
+          <p:cNvPr id="6" name="CuadroTexto 5">
+            <a:extLst>
+              <a:ext uri="{FF2B5EF4-FFF2-40B4-BE49-F238E27FC236}">
+                <a16:creationId xmlns:a16="http://schemas.microsoft.com/office/drawing/2014/main" id="{CE4F37E4-6BA2-F83F-177F-21C522FF978A}"/>
+              </a:ext>
+            </a:extLst>
+          </p:cNvPr>
+          <p:cNvSpPr txBox="1"/>
+          <p:nvPr/>
+        </p:nvSpPr>
+        <p:spPr>
+          <a:xfrm>
+            <a:off x="1926166" y="88135"/>
+            <a:ext cx="5291667" cy="307777"/>
+          </a:xfrm>
+          <a:prstGeom prst="rect">
+            <a:avLst/>
+          </a:prstGeom>
+          <a:noFill/>
+        </p:spPr>
+        <p:txBody>
+          <a:bodyPr wrap="square" rtlCol="0">
+            <a:spAutoFit/>
+          </a:bodyPr>
+          <a:lstStyle/>
+          <a:p>
+            <a:pPr algn="ctr"/>
+            <a:r>
+              <a:rPr lang="es-MX" b="1" dirty="0">
+                <a:latin typeface="Montserrat" pitchFamily="2" charset="0"/>
+              </a:rPr>
+              <a:t>Temas de gobierno por radiodifusora</a:t>
+            </a:r>
+          </a:p>
+        </p:txBody>
+      </p:sp>
+      <p:pic>
+        <p:nvPicPr>
+          <p:cNvPr id="4" name="Imagen 3">
+            <a:extLst>
+              <a:ext uri="{FF2B5EF4-FFF2-40B4-BE49-F238E27FC236}">
+                <a16:creationId xmlns:a16="http://schemas.microsoft.com/office/drawing/2014/main" id="{4F72199A-99CA-B527-072B-FD887DA6B07F}"/>
+              </a:ext>
+            </a:extLst>
+          </p:cNvPr>
+          <p:cNvPicPr>
+            <a:picLocks noChangeAspect="1"/>
+          </p:cNvPicPr>
+          <p:nvPr/>
+        </p:nvPicPr>
+        <p:blipFill>
+          <a:blip r:embed="rId2"/>
+          <a:stretch>
+            <a:fillRect/>
+          </a:stretch>
+        </p:blipFill>
+        <p:spPr>
+          <a:xfrm>
+            <a:off x="0" y="1110812"/>
+            <a:ext cx="9144000" cy="2921876"/>
+          </a:xfrm>
+          <a:prstGeom prst="rect">
+            <a:avLst/>
+          </a:prstGeom>
+        </p:spPr>
+      </p:pic>
+    </p:spTree>
+    <p:extLst>
+      <p:ext uri="{BB962C8B-B14F-4D97-AF65-F5344CB8AC3E}">
+        <p14:creationId xmlns:p14="http://schemas.microsoft.com/office/powerpoint/2010/main" val="3202946265"/>
+      </p:ext>
+    </p:extLst>
+  </p:cSld>
+  <p:clrMapOvr>
+    <a:masterClrMapping/>
+  </p:clrMapOvr>
+</p:sld>
+</file>
+
+<file path=ppt/slides/slide13.xml><?xml version="1.0" encoding="utf-8"?>
 <p:sld xmlns:a="http://schemas.openxmlformats.org/drawingml/2006/main" xmlns:r="http://schemas.openxmlformats.org/officeDocument/2006/relationships" xmlns:p="http://schemas.openxmlformats.org/presentationml/2006/main">
   <p:cSld>
     <p:spTree>
@@ -6292,10 +6467,10 @@
       </p:sp>
       <p:pic>
         <p:nvPicPr>
-          <p:cNvPr id="3" name="Imagen 2">
+          <p:cNvPr id="4" name="Imagen 3">
             <a:extLst>
               <a:ext uri="{FF2B5EF4-FFF2-40B4-BE49-F238E27FC236}">
-                <a16:creationId xmlns:a16="http://schemas.microsoft.com/office/drawing/2014/main" id="{69BC2A94-1AE7-1CBE-4E59-8B71249EFF92}"/>
+                <a16:creationId xmlns:a16="http://schemas.microsoft.com/office/drawing/2014/main" id="{FE9F976D-88B8-AEEB-C887-FF67555AAC6D}"/>
               </a:ext>
             </a:extLst>
           </p:cNvPr>
@@ -6312,8 +6487,8 @@
         </p:blipFill>
         <p:spPr>
           <a:xfrm>
-            <a:off x="0" y="1021056"/>
-            <a:ext cx="9144000" cy="3101388"/>
+            <a:off x="0" y="1230957"/>
+            <a:ext cx="9144000" cy="2681586"/>
           </a:xfrm>
           <a:prstGeom prst="rect">
             <a:avLst/>
@@ -6333,12 +6508,18 @@
 </p:sld>
 </file>
 
-<file path=ppt/slides/slide13.xml><?xml version="1.0" encoding="utf-8"?>
+<file path=ppt/slides/slide14.xml><?xml version="1.0" encoding="utf-8"?>
 <p:sld xmlns:a="http://schemas.openxmlformats.org/drawingml/2006/main" xmlns:r="http://schemas.openxmlformats.org/officeDocument/2006/relationships" xmlns:p="http://schemas.openxmlformats.org/presentationml/2006/main">
   <p:cSld>
     <p:spTree>
       <p:nvGrpSpPr>
-        <p:cNvPr id="1" name=""/>
+        <p:cNvPr id="1" name="">
+          <a:extLst>
+            <a:ext uri="{FF2B5EF4-FFF2-40B4-BE49-F238E27FC236}">
+              <a16:creationId xmlns:a16="http://schemas.microsoft.com/office/drawing/2014/main" id="{200C1A25-C9EE-F5E8-70B0-72848C49620B}"/>
+            </a:ext>
+          </a:extLst>
+        </p:cNvPr>
         <p:cNvGrpSpPr/>
         <p:nvPr/>
       </p:nvGrpSpPr>
@@ -6352,10 +6533,10 @@
       </p:grpSpPr>
       <p:sp>
         <p:nvSpPr>
-          <p:cNvPr id="6" name="CuadroTexto 5">
+          <p:cNvPr id="8" name="CuadroTexto 7">
             <a:extLst>
               <a:ext uri="{FF2B5EF4-FFF2-40B4-BE49-F238E27FC236}">
-                <a16:creationId xmlns:a16="http://schemas.microsoft.com/office/drawing/2014/main" id="{CE4F37E4-6BA2-F83F-177F-21C522FF978A}"/>
+                <a16:creationId xmlns:a16="http://schemas.microsoft.com/office/drawing/2014/main" id="{BD034C7B-D28A-2217-7904-DE5230378964}"/>
               </a:ext>
             </a:extLst>
           </p:cNvPr>
@@ -6364,7 +6545,7 @@
         </p:nvSpPr>
         <p:spPr>
           <a:xfrm>
-            <a:off x="1926166" y="88135"/>
+            <a:off x="1926166" y="0"/>
             <a:ext cx="5291667" cy="307777"/>
           </a:xfrm>
           <a:prstGeom prst="rect">
@@ -6393,7 +6574,7 @@
           <p:cNvPr id="3" name="Imagen 2">
             <a:extLst>
               <a:ext uri="{FF2B5EF4-FFF2-40B4-BE49-F238E27FC236}">
-                <a16:creationId xmlns:a16="http://schemas.microsoft.com/office/drawing/2014/main" id="{9B490356-DB2A-07B7-A1E3-B36F337C906F}"/>
+                <a16:creationId xmlns:a16="http://schemas.microsoft.com/office/drawing/2014/main" id="{F6CBF3F2-2D38-D8FB-1992-BFF281610799}"/>
               </a:ext>
             </a:extLst>
           </p:cNvPr>
@@ -6410,8 +6591,8 @@
         </p:blipFill>
         <p:spPr>
           <a:xfrm>
-            <a:off x="0" y="1178378"/>
-            <a:ext cx="9144000" cy="2786743"/>
+            <a:off x="361362" y="704589"/>
+            <a:ext cx="8421275" cy="3734321"/>
           </a:xfrm>
           <a:prstGeom prst="rect">
             <a:avLst/>
@@ -6421,7 +6602,7 @@
     </p:spTree>
     <p:extLst>
       <p:ext uri="{BB962C8B-B14F-4D97-AF65-F5344CB8AC3E}">
-        <p14:creationId xmlns:p14="http://schemas.microsoft.com/office/powerpoint/2010/main" val="3202946265"/>
+        <p14:creationId xmlns:p14="http://schemas.microsoft.com/office/powerpoint/2010/main" val="3986551415"/>
       </p:ext>
     </p:extLst>
   </p:cSld>
@@ -6431,7 +6612,7 @@
 </p:sld>
 </file>
 
-<file path=ppt/slides/slide14.xml><?xml version="1.0" encoding="utf-8"?>
+<file path=ppt/slides/slide15.xml><?xml version="1.0" encoding="utf-8"?>
 <p:sld xmlns:a="http://schemas.openxmlformats.org/drawingml/2006/main" xmlns:r="http://schemas.openxmlformats.org/officeDocument/2006/relationships" xmlns:p="http://schemas.openxmlformats.org/presentationml/2006/main">
   <p:cSld>
     <p:spTree>
@@ -7418,12 +7599,50 @@
           <a:chExt cx="0" cy="0"/>
         </a:xfrm>
       </p:grpSpPr>
+      <p:sp>
+        <p:nvSpPr>
+          <p:cNvPr id="2" name="CuadroTexto 1">
+            <a:extLst>
+              <a:ext uri="{FF2B5EF4-FFF2-40B4-BE49-F238E27FC236}">
+                <a16:creationId xmlns:a16="http://schemas.microsoft.com/office/drawing/2014/main" id="{63A896FC-8168-8E2C-E4F7-11A96AAB671C}"/>
+              </a:ext>
+            </a:extLst>
+          </p:cNvPr>
+          <p:cNvSpPr txBox="1"/>
+          <p:nvPr/>
+        </p:nvSpPr>
+        <p:spPr>
+          <a:xfrm>
+            <a:off x="1183340" y="0"/>
+            <a:ext cx="6763871" cy="369332"/>
+          </a:xfrm>
+          <a:prstGeom prst="rect">
+            <a:avLst/>
+          </a:prstGeom>
+          <a:noFill/>
+        </p:spPr>
+        <p:txBody>
+          <a:bodyPr wrap="square" rtlCol="0">
+            <a:spAutoFit/>
+          </a:bodyPr>
+          <a:lstStyle/>
+          <a:p>
+            <a:pPr algn="ctr"/>
+            <a:r>
+              <a:rPr lang="es-MX" sz="1800" b="1" dirty="0">
+                <a:latin typeface="Montserrat" panose="00000500000000000000" pitchFamily="2" charset="0"/>
+              </a:rPr>
+              <a:t>Información de gobierno en radiodifusoras</a:t>
+            </a:r>
+          </a:p>
+        </p:txBody>
+      </p:sp>
       <p:pic>
         <p:nvPicPr>
-          <p:cNvPr id="3" name="Imagen 2">
+          <p:cNvPr id="7" name="Imagen 6">
             <a:extLst>
               <a:ext uri="{FF2B5EF4-FFF2-40B4-BE49-F238E27FC236}">
-                <a16:creationId xmlns:a16="http://schemas.microsoft.com/office/drawing/2014/main" id="{ED45CC2A-F77E-F97E-C0DE-08F037B1E96D}"/>
+                <a16:creationId xmlns:a16="http://schemas.microsoft.com/office/drawing/2014/main" id="{83241F5A-B42C-9519-80C6-9F6816F2CD14}"/>
               </a:ext>
             </a:extLst>
           </p:cNvPr>
@@ -7440,8 +7659,8 @@
         </p:blipFill>
         <p:spPr>
           <a:xfrm>
-            <a:off x="0" y="441981"/>
-            <a:ext cx="9144000" cy="4259538"/>
+            <a:off x="132942" y="369332"/>
+            <a:ext cx="8805091" cy="4774168"/>
           </a:xfrm>
           <a:prstGeom prst="rect">
             <a:avLst/>
@@ -7478,12 +7697,50 @@
           <a:chExt cx="0" cy="0"/>
         </a:xfrm>
       </p:grpSpPr>
+      <p:sp>
+        <p:nvSpPr>
+          <p:cNvPr id="5" name="CuadroTexto 4">
+            <a:extLst>
+              <a:ext uri="{FF2B5EF4-FFF2-40B4-BE49-F238E27FC236}">
+                <a16:creationId xmlns:a16="http://schemas.microsoft.com/office/drawing/2014/main" id="{1430F0AF-D0FD-1C68-F7C4-D9E93764E31F}"/>
+              </a:ext>
+            </a:extLst>
+          </p:cNvPr>
+          <p:cNvSpPr txBox="1"/>
+          <p:nvPr/>
+        </p:nvSpPr>
+        <p:spPr>
+          <a:xfrm>
+            <a:off x="1183340" y="0"/>
+            <a:ext cx="6763871" cy="369332"/>
+          </a:xfrm>
+          <a:prstGeom prst="rect">
+            <a:avLst/>
+          </a:prstGeom>
+          <a:noFill/>
+        </p:spPr>
+        <p:txBody>
+          <a:bodyPr wrap="square" rtlCol="0">
+            <a:spAutoFit/>
+          </a:bodyPr>
+          <a:lstStyle/>
+          <a:p>
+            <a:pPr algn="ctr"/>
+            <a:r>
+              <a:rPr lang="es-MX" sz="1800" b="1" dirty="0">
+                <a:latin typeface="Montserrat" panose="00000500000000000000" pitchFamily="2" charset="0"/>
+              </a:rPr>
+              <a:t>Información de gobierno en radiodifusoras</a:t>
+            </a:r>
+          </a:p>
+        </p:txBody>
+      </p:sp>
       <p:pic>
         <p:nvPicPr>
-          <p:cNvPr id="3" name="Imagen 2">
+          <p:cNvPr id="7" name="Imagen 6">
             <a:extLst>
               <a:ext uri="{FF2B5EF4-FFF2-40B4-BE49-F238E27FC236}">
-                <a16:creationId xmlns:a16="http://schemas.microsoft.com/office/drawing/2014/main" id="{368ECD6F-A562-B2E6-7831-A50428DD3D27}"/>
+                <a16:creationId xmlns:a16="http://schemas.microsoft.com/office/drawing/2014/main" id="{CB878565-BE85-9199-6DC7-3FEAD5519C71}"/>
               </a:ext>
             </a:extLst>
           </p:cNvPr>
@@ -7500,8 +7757,8 @@
         </p:blipFill>
         <p:spPr>
           <a:xfrm>
-            <a:off x="0" y="640857"/>
-            <a:ext cx="9144000" cy="3861786"/>
+            <a:off x="0" y="762933"/>
+            <a:ext cx="9144000" cy="3617634"/>
           </a:xfrm>
           <a:prstGeom prst="rect">
             <a:avLst/>
